--- a/docs/FirstCheck24_Architecture_60s.pptx
+++ b/docs/FirstCheck24_Architecture_60s.pptx
@@ -502,7 +502,7 @@
           <a:p>
             <a:r>
               <a:rPr lang="en-US" dirty="0"/>
-              <a:t>FirstCheck24 runs one evidence pipeline with two connected entry paths. Outbound starts from the fund thesis. A discovery agent scans public sources, creates an initial signal score, and places high-potential founders in a promising queue. A footprint agent then resolves identity and gathers deeper technical, company, and network evidence. The three-axis engine scores Founder, Market, and Idea–Market Fit independently, including trends, confidence, and SWOT. If the case is strong, the outreach agent drafts a personalized message, with the investor approving the send. When a founder applies inbound and uploads a deck, the deck agent extracts claims and adds them to the same evidence graph. The system re-scores the opportunity, highlights contradictions, and produces an explainable recommendation: proceed, hold, or decline. Every human decision feeds memory and improves the next search.</a:t>
+              <a:t>FirstCheck24 is built as one evidence pipeline with two entry paths. Outbound starts from an investor thesis: discovery agents scan public sources, create a signal score, promote promising founders, enrich their digital footprints, and draft approved outreach. Inbound starts with an application or pitch deck: a deck agent extracts claims and adds them to the same evidence graph. Both paths converge on our explainable three-axis engine, which scores Founder, Market, and Idea–Market Fit independently, with SWOT, trends, confidence, and source-level provenance. React and TypeScript power the investor workflow. FastAPI orchestrates agent services, while ARQ and Redis run asynchronous collection jobs. Postgres and pgvector store identities, evidence, memory, and scores; MinIO preserves source artifacts, and Docker makes deployment reproducible. Finally, the system recommends proceed, hold, or decline, while every human decision feeds memory and improves future discovery and scoring.</a:t>
             </a:r>
             <a:endParaRPr lang="en-US" dirty="0"/>
           </a:p>
